--- a/Schools_ML_Track/camp_2026/slides/DA/DA18.pptx
+++ b/Schools_ML_Track/camp_2026/slides/DA/DA18.pptx
@@ -116,7 +116,7 @@
   <p:extLst>
     <p:ext uri="{521415D9-36F7-43E2-AB2F-B90AF26B5E84}">
       <p14:sectionLst xmlns:p14="http://schemas.microsoft.com/office/powerpoint/2010/main">
-        <p14:section name="Opening" id="{47bd2602-596e-d386-74fa-308e005cd388}">
+        <p14:section name="Opening" id="{7f333332-db66-de9f-3105-e2dc9cfc576f}">
           <p14:sldIdLst>
             <p14:sldId id="256"/>
             <p14:sldId id="257"/>
@@ -126,7 +126,7 @@
             <p14:sldId id="261"/>
           </p14:sldIdLst>
         </p14:section>
-        <p14:section name="Make and close" id="{a08d2ce6-98a9-5596-a787-a62c7eb756bc}">
+        <p14:section name="Make and close" id="{3ddf6a0d-3f0c-e941-d87c-ef7836ed7bb5}">
           <p14:sldIdLst>
             <p14:sldId id="262"/>
             <p14:sldId id="263"/>

--- a/Schools_ML_Track/camp_2026/slides/DA/DA18.pptx
+++ b/Schools_ML_Track/camp_2026/slides/DA/DA18.pptx
@@ -116,7 +116,7 @@
   <p:extLst>
     <p:ext uri="{521415D9-36F7-43E2-AB2F-B90AF26B5E84}">
       <p14:sectionLst xmlns:p14="http://schemas.microsoft.com/office/powerpoint/2010/main">
-        <p14:section name="Opening" id="{7f333332-db66-de9f-3105-e2dc9cfc576f}">
+        <p14:section name="Opening" id="{7dba427b-4ac9-08b1-f053-052c5e45a154}">
           <p14:sldIdLst>
             <p14:sldId id="256"/>
             <p14:sldId id="257"/>
@@ -126,7 +126,7 @@
             <p14:sldId id="261"/>
           </p14:sldIdLst>
         </p14:section>
-        <p14:section name="Make and close" id="{3ddf6a0d-3f0c-e941-d87c-ef7836ed7bb5}">
+        <p14:section name="Make and close" id="{3d15346b-462a-4d3e-7568-b703d703967e}">
           <p14:sldIdLst>
             <p14:sldId id="262"/>
             <p14:sldId id="263"/>
@@ -2078,7 +2078,24 @@
                 <a:ea typeface="Lato" pitchFamily="34" charset="-122"/>
                 <a:cs typeface="Lato" pitchFamily="34" charset="-120"/>
               </a:rPr>
-              <a:t>Checkpoint two: clean, merge and reconcile</a:t>
+              <a:t>Checkpoint two: clean,</a:t>
+            </a:r>
+            <a:endParaRPr lang="en-US" sz="5600" dirty="0"/>
+          </a:p>
+          <a:p>
+            <a:pPr algn="l" indent="0" marL="0">
+              <a:buNone/>
+            </a:pPr>
+            <a:r>
+              <a:rPr lang="en-US" sz="5600" b="1" dirty="0">
+                <a:solidFill>
+                  <a:srgbClr val="FFFFFF"/>
+                </a:solidFill>
+                <a:latin typeface="Lato" pitchFamily="34" charset="0"/>
+                <a:ea typeface="Lato" pitchFamily="34" charset="-122"/>
+                <a:cs typeface="Lato" pitchFamily="34" charset="-120"/>
+              </a:rPr>
+              <a:t>merge and reconcile</a:t>
             </a:r>
             <a:endParaRPr lang="en-US" sz="5600" dirty="0"/>
           </a:p>
@@ -3426,15 +3443,15 @@
           <a:p>
             <a:pPr algn="l" indent="0" marL="0">
               <a:lnSpc>
-                <a:spcPts val="3600"/>
+                <a:spcPts val="2880"/>
               </a:lnSpc>
               <a:spcAft>
-                <a:spcPts val="2520"/>
+                <a:spcPts val="2020"/>
               </a:spcAft>
               <a:buNone/>
             </a:pPr>
             <a:r>
-              <a:rPr lang="en-US" sz="3000" dirty="0">
+              <a:rPr lang="en-US" sz="2400" dirty="0">
                 <a:solidFill>
                   <a:srgbClr val="111111"/>
                 </a:solidFill>
@@ -3442,9 +3459,101 @@
                 <a:ea typeface="Lato" pitchFamily="34" charset="-122"/>
                 <a:cs typeface="Lato" pitchFamily="34" charset="-120"/>
               </a:rPr>
-              <a:t>In DA18.ipynb start from sunrise_sales_raw.csv. 1) Clean it with a function and report the rows kept, rows excluded and the cleaning steps. 2) Merge the clean table with the products table on product_id. Check that the key is unique and that the row count is unchanged. 3) Total the revenue by category.</a:t>
-            </a:r>
-            <a:endParaRPr lang="en-US" sz="3000" dirty="0"/>
+              <a:t>In DA18.ipynb start from sunrise_sales_raw.csv.</a:t>
+            </a:r>
+            <a:endParaRPr lang="en-US" sz="2400" dirty="0"/>
+          </a:p>
+          <a:p>
+            <a:pPr algn="l" indent="0" marL="0">
+              <a:lnSpc>
+                <a:spcPts val="2880"/>
+              </a:lnSpc>
+              <a:spcAft>
+                <a:spcPts val="2020"/>
+              </a:spcAft>
+              <a:buNone/>
+            </a:pPr>
+            <a:r>
+              <a:rPr lang="en-US" sz="2400" dirty="0">
+                <a:solidFill>
+                  <a:srgbClr val="111111"/>
+                </a:solidFill>
+                <a:latin typeface="Lato" pitchFamily="34" charset="0"/>
+                <a:ea typeface="Lato" pitchFamily="34" charset="-122"/>
+                <a:cs typeface="Lato" pitchFamily="34" charset="-120"/>
+              </a:rPr>
+              <a:t>1) Clean it with a function and report the rows kept, rows excluded and the cleaning steps.</a:t>
+            </a:r>
+            <a:endParaRPr lang="en-US" sz="2400" dirty="0"/>
+          </a:p>
+          <a:p>
+            <a:pPr algn="l" indent="0" marL="0">
+              <a:lnSpc>
+                <a:spcPts val="2880"/>
+              </a:lnSpc>
+              <a:spcAft>
+                <a:spcPts val="2020"/>
+              </a:spcAft>
+              <a:buNone/>
+            </a:pPr>
+            <a:r>
+              <a:rPr lang="en-US" sz="2400" dirty="0">
+                <a:solidFill>
+                  <a:srgbClr val="111111"/>
+                </a:solidFill>
+                <a:latin typeface="Lato" pitchFamily="34" charset="0"/>
+                <a:ea typeface="Lato" pitchFamily="34" charset="-122"/>
+                <a:cs typeface="Lato" pitchFamily="34" charset="-120"/>
+              </a:rPr>
+              <a:t>2) Merge the clean table with the products table on product_id.</a:t>
+            </a:r>
+            <a:endParaRPr lang="en-US" sz="2400" dirty="0"/>
+          </a:p>
+          <a:p>
+            <a:pPr algn="l" indent="0" marL="0">
+              <a:lnSpc>
+                <a:spcPts val="2880"/>
+              </a:lnSpc>
+              <a:spcAft>
+                <a:spcPts val="2020"/>
+              </a:spcAft>
+              <a:buNone/>
+            </a:pPr>
+            <a:r>
+              <a:rPr lang="en-US" sz="2400" dirty="0">
+                <a:solidFill>
+                  <a:srgbClr val="111111"/>
+                </a:solidFill>
+                <a:latin typeface="Lato" pitchFamily="34" charset="0"/>
+                <a:ea typeface="Lato" pitchFamily="34" charset="-122"/>
+                <a:cs typeface="Lato" pitchFamily="34" charset="-120"/>
+              </a:rPr>
+              <a:t>Check that the key is unique and that the row count is unchanged.</a:t>
+            </a:r>
+            <a:endParaRPr lang="en-US" sz="2400" dirty="0"/>
+          </a:p>
+          <a:p>
+            <a:pPr algn="l" indent="0" marL="0">
+              <a:lnSpc>
+                <a:spcPts val="2880"/>
+              </a:lnSpc>
+              <a:spcAft>
+                <a:spcPts val="2020"/>
+              </a:spcAft>
+              <a:buNone/>
+            </a:pPr>
+            <a:r>
+              <a:rPr lang="en-US" sz="2400" dirty="0">
+                <a:solidFill>
+                  <a:srgbClr val="111111"/>
+                </a:solidFill>
+                <a:latin typeface="Lato" pitchFamily="34" charset="0"/>
+                <a:ea typeface="Lato" pitchFamily="34" charset="-122"/>
+                <a:cs typeface="Lato" pitchFamily="34" charset="-120"/>
+              </a:rPr>
+              <a:t>3) Total the revenue by category.</a:t>
+            </a:r>
+            <a:endParaRPr lang="en-US" sz="2400" dirty="0"/>
           </a:p>
         </p:txBody>
       </p:sp>
@@ -3609,15 +3718,15 @@
           <a:p>
             <a:pPr algn="l" indent="0" marL="0">
               <a:lnSpc>
-                <a:spcPts val="3240"/>
+                <a:spcPts val="2880"/>
               </a:lnSpc>
               <a:spcAft>
-                <a:spcPts val="2520"/>
+                <a:spcPts val="2020"/>
               </a:spcAft>
               <a:buNone/>
             </a:pPr>
             <a:r>
-              <a:rPr lang="en-US" sz="2700" dirty="0">
+              <a:rPr lang="en-US" sz="2400" dirty="0">
                 <a:solidFill>
                   <a:srgbClr val="111111"/>
                 </a:solidFill>
@@ -3625,22 +3734,22 @@
                 <a:ea typeface="Lato" pitchFamily="34" charset="-122"/>
                 <a:cs typeface="Lato" pitchFamily="34" charset="-120"/>
               </a:rPr>
-              <a:t>4) Compare the cleaned total with the true total in sunrise_sales.csv. Name the residual and its cause. 5) Write two limitations. Run from a restarted kernel, save and submit DA18.ipynb and a short explanation of your checks through the route in START_HERE.md.</a:t>
-            </a:r>
-            <a:endParaRPr lang="en-US" sz="2700" dirty="0"/>
+              <a:t>4) Compare the cleaned total with the true total in sunrise_sales.csv.</a:t>
+            </a:r>
+            <a:endParaRPr lang="en-US" sz="2400" dirty="0"/>
           </a:p>
           <a:p>
             <a:pPr algn="l" indent="0" marL="0">
               <a:lnSpc>
-                <a:spcPts val="3240"/>
+                <a:spcPts val="2880"/>
               </a:lnSpc>
               <a:spcAft>
-                <a:spcPts val="2520"/>
+                <a:spcPts val="2020"/>
               </a:spcAft>
               <a:buNone/>
             </a:pPr>
             <a:r>
-              <a:rPr lang="en-US" sz="2700" dirty="0">
+              <a:rPr lang="en-US" sz="2400" dirty="0">
                 <a:solidFill>
                   <a:srgbClr val="111111"/>
                 </a:solidFill>
@@ -3648,9 +3757,78 @@
                 <a:ea typeface="Lato" pitchFamily="34" charset="-122"/>
                 <a:cs typeface="Lato" pitchFamily="34" charset="-120"/>
               </a:rPr>
-              <a:t>Save it as DA18. Write two sentences: what you changed and how you checked it.</a:t>
-            </a:r>
-            <a:endParaRPr lang="en-US" sz="2700" dirty="0"/>
+              <a:t>Name the residual and its cause.</a:t>
+            </a:r>
+            <a:endParaRPr lang="en-US" sz="2400" dirty="0"/>
+          </a:p>
+          <a:p>
+            <a:pPr algn="l" indent="0" marL="0">
+              <a:lnSpc>
+                <a:spcPts val="2880"/>
+              </a:lnSpc>
+              <a:spcAft>
+                <a:spcPts val="2020"/>
+              </a:spcAft>
+              <a:buNone/>
+            </a:pPr>
+            <a:r>
+              <a:rPr lang="en-US" sz="2400" dirty="0">
+                <a:solidFill>
+                  <a:srgbClr val="111111"/>
+                </a:solidFill>
+                <a:latin typeface="Lato" pitchFamily="34" charset="0"/>
+                <a:ea typeface="Lato" pitchFamily="34" charset="-122"/>
+                <a:cs typeface="Lato" pitchFamily="34" charset="-120"/>
+              </a:rPr>
+              <a:t>5) Write two limitations.</a:t>
+            </a:r>
+            <a:endParaRPr lang="en-US" sz="2400" dirty="0"/>
+          </a:p>
+          <a:p>
+            <a:pPr algn="l" indent="0" marL="0">
+              <a:lnSpc>
+                <a:spcPts val="2880"/>
+              </a:lnSpc>
+              <a:spcAft>
+                <a:spcPts val="2020"/>
+              </a:spcAft>
+              <a:buNone/>
+            </a:pPr>
+            <a:r>
+              <a:rPr lang="en-US" sz="2400" dirty="0">
+                <a:solidFill>
+                  <a:srgbClr val="111111"/>
+                </a:solidFill>
+                <a:latin typeface="Lato" pitchFamily="34" charset="0"/>
+                <a:ea typeface="Lato" pitchFamily="34" charset="-122"/>
+                <a:cs typeface="Lato" pitchFamily="34" charset="-120"/>
+              </a:rPr>
+              <a:t>Run from a restarted kernel, save and submit DA18.ipynb and a short explanation of your checks through the route in START_HERE.md.</a:t>
+            </a:r>
+            <a:endParaRPr lang="en-US" sz="2400" dirty="0"/>
+          </a:p>
+          <a:p>
+            <a:pPr algn="l" indent="0" marL="0">
+              <a:lnSpc>
+                <a:spcPts val="2880"/>
+              </a:lnSpc>
+              <a:spcAft>
+                <a:spcPts val="2020"/>
+              </a:spcAft>
+              <a:buNone/>
+            </a:pPr>
+            <a:r>
+              <a:rPr lang="en-US" sz="2400" dirty="0">
+                <a:solidFill>
+                  <a:srgbClr val="111111"/>
+                </a:solidFill>
+                <a:latin typeface="Lato" pitchFamily="34" charset="0"/>
+                <a:ea typeface="Lato" pitchFamily="34" charset="-122"/>
+                <a:cs typeface="Lato" pitchFamily="34" charset="-120"/>
+              </a:rPr>
+              <a:t>Write two sentences: what you changed and how you checked it.</a:t>
+            </a:r>
+            <a:endParaRPr lang="en-US" sz="2400" dirty="0"/>
           </a:p>
         </p:txBody>
       </p:sp>
